--- a/figures/figures.pptx
+++ b/figures/figures.pptx
@@ -5,10 +5,10 @@
     <p:sldMasterId id="2147483648" r:id="rId1"/>
   </p:sldMasterIdLst>
   <p:sldIdLst>
-    <p:sldId id="256" r:id="rId2"/>
-    <p:sldId id="257" r:id="rId3"/>
-    <p:sldId id="258" r:id="rId4"/>
-    <p:sldId id="259" r:id="rId5"/>
+    <p:sldId id="259" r:id="rId2"/>
+    <p:sldId id="260" r:id="rId3"/>
+    <p:sldId id="261" r:id="rId4"/>
+    <p:sldId id="262" r:id="rId5"/>
   </p:sldIdLst>
   <p:sldSz cx="12192000" cy="6858000"/>
   <p:notesSz cx="6858000" cy="9144000"/>
@@ -262,7 +262,7 @@
           <a:p>
             <a:fld id="{ED5C9BF6-FB48-42B2-903D-552F59BF9BD8}" type="datetimeFigureOut">
               <a:rPr lang="en-US" smtClean="0"/>
-              <a:t>3/4/2025</a:t>
+              <a:t>6/4/2025</a:t>
             </a:fld>
             <a:endParaRPr lang="en-US"/>
           </a:p>
@@ -460,7 +460,7 @@
           <a:p>
             <a:fld id="{ED5C9BF6-FB48-42B2-903D-552F59BF9BD8}" type="datetimeFigureOut">
               <a:rPr lang="en-US" smtClean="0"/>
-              <a:t>3/4/2025</a:t>
+              <a:t>6/4/2025</a:t>
             </a:fld>
             <a:endParaRPr lang="en-US"/>
           </a:p>
@@ -668,7 +668,7 @@
           <a:p>
             <a:fld id="{ED5C9BF6-FB48-42B2-903D-552F59BF9BD8}" type="datetimeFigureOut">
               <a:rPr lang="en-US" smtClean="0"/>
-              <a:t>3/4/2025</a:t>
+              <a:t>6/4/2025</a:t>
             </a:fld>
             <a:endParaRPr lang="en-US"/>
           </a:p>
@@ -866,7 +866,7 @@
           <a:p>
             <a:fld id="{ED5C9BF6-FB48-42B2-903D-552F59BF9BD8}" type="datetimeFigureOut">
               <a:rPr lang="en-US" smtClean="0"/>
-              <a:t>3/4/2025</a:t>
+              <a:t>6/4/2025</a:t>
             </a:fld>
             <a:endParaRPr lang="en-US"/>
           </a:p>
@@ -1141,7 +1141,7 @@
           <a:p>
             <a:fld id="{ED5C9BF6-FB48-42B2-903D-552F59BF9BD8}" type="datetimeFigureOut">
               <a:rPr lang="en-US" smtClean="0"/>
-              <a:t>3/4/2025</a:t>
+              <a:t>6/4/2025</a:t>
             </a:fld>
             <a:endParaRPr lang="en-US"/>
           </a:p>
@@ -1406,7 +1406,7 @@
           <a:p>
             <a:fld id="{ED5C9BF6-FB48-42B2-903D-552F59BF9BD8}" type="datetimeFigureOut">
               <a:rPr lang="en-US" smtClean="0"/>
-              <a:t>3/4/2025</a:t>
+              <a:t>6/4/2025</a:t>
             </a:fld>
             <a:endParaRPr lang="en-US"/>
           </a:p>
@@ -1818,7 +1818,7 @@
           <a:p>
             <a:fld id="{ED5C9BF6-FB48-42B2-903D-552F59BF9BD8}" type="datetimeFigureOut">
               <a:rPr lang="en-US" smtClean="0"/>
-              <a:t>3/4/2025</a:t>
+              <a:t>6/4/2025</a:t>
             </a:fld>
             <a:endParaRPr lang="en-US"/>
           </a:p>
@@ -1959,7 +1959,7 @@
           <a:p>
             <a:fld id="{ED5C9BF6-FB48-42B2-903D-552F59BF9BD8}" type="datetimeFigureOut">
               <a:rPr lang="en-US" smtClean="0"/>
-              <a:t>3/4/2025</a:t>
+              <a:t>6/4/2025</a:t>
             </a:fld>
             <a:endParaRPr lang="en-US"/>
           </a:p>
@@ -2072,7 +2072,7 @@
           <a:p>
             <a:fld id="{ED5C9BF6-FB48-42B2-903D-552F59BF9BD8}" type="datetimeFigureOut">
               <a:rPr lang="en-US" smtClean="0"/>
-              <a:t>3/4/2025</a:t>
+              <a:t>6/4/2025</a:t>
             </a:fld>
             <a:endParaRPr lang="en-US"/>
           </a:p>
@@ -2383,7 +2383,7 @@
           <a:p>
             <a:fld id="{ED5C9BF6-FB48-42B2-903D-552F59BF9BD8}" type="datetimeFigureOut">
               <a:rPr lang="en-US" smtClean="0"/>
-              <a:t>3/4/2025</a:t>
+              <a:t>6/4/2025</a:t>
             </a:fld>
             <a:endParaRPr lang="en-US"/>
           </a:p>
@@ -2671,7 +2671,7 @@
           <a:p>
             <a:fld id="{ED5C9BF6-FB48-42B2-903D-552F59BF9BD8}" type="datetimeFigureOut">
               <a:rPr lang="en-US" smtClean="0"/>
-              <a:t>3/4/2025</a:t>
+              <a:t>6/4/2025</a:t>
             </a:fld>
             <a:endParaRPr lang="en-US"/>
           </a:p>
@@ -2912,7 +2912,7 @@
           <a:p>
             <a:fld id="{ED5C9BF6-FB48-42B2-903D-552F59BF9BD8}" type="datetimeFigureOut">
               <a:rPr lang="en-US" smtClean="0"/>
-              <a:t>3/4/2025</a:t>
+              <a:t>6/4/2025</a:t>
             </a:fld>
             <a:endParaRPr lang="en-US"/>
           </a:p>
@@ -3334,15 +3334,15 @@
           <p:cNvPr id="2" name="Title 1">
             <a:extLst>
               <a:ext uri="{FF2B5EF4-FFF2-40B4-BE49-F238E27FC236}">
-                <a16:creationId xmlns:a16="http://schemas.microsoft.com/office/drawing/2014/main" id="{BC7218F5-608E-4DFF-913D-60EEC2DD9429}"/>
-              </a:ext>
-            </a:extLst>
-          </p:cNvPr>
-          <p:cNvSpPr>
-            <a:spLocks noGrp="1"/>
-          </p:cNvSpPr>
-          <p:nvPr>
-            <p:ph type="ctrTitle"/>
+                <a16:creationId xmlns:a16="http://schemas.microsoft.com/office/drawing/2014/main" id="{8A1822CF-D0FA-43E7-BD6D-95C762EEF6A1}"/>
+              </a:ext>
+            </a:extLst>
+          </p:cNvPr>
+          <p:cNvSpPr>
+            <a:spLocks noGrp="1"/>
+          </p:cNvSpPr>
+          <p:nvPr>
+            <p:ph type="title"/>
           </p:nvPr>
         </p:nvSpPr>
         <p:spPr/>
@@ -3350,27 +3350,24 @@
           <a:bodyPr/>
           <a:lstStyle/>
           <a:p>
-            <a:r>
-              <a:rPr lang="en-US" dirty="0"/>
-              <a:t>grid_ll.1_lt_.1</a:t>
-            </a:r>
-          </a:p>
-        </p:txBody>
-      </p:sp>
-      <p:sp>
-        <p:nvSpPr>
-          <p:cNvPr id="3" name="Subtitle 2">
-            <a:extLst>
-              <a:ext uri="{FF2B5EF4-FFF2-40B4-BE49-F238E27FC236}">
-                <a16:creationId xmlns:a16="http://schemas.microsoft.com/office/drawing/2014/main" id="{7224C247-5EF8-414A-A231-70C8919358D9}"/>
-              </a:ext>
-            </a:extLst>
-          </p:cNvPr>
-          <p:cNvSpPr>
-            <a:spLocks noGrp="1"/>
-          </p:cNvSpPr>
-          <p:nvPr>
-            <p:ph type="subTitle" idx="1"/>
+            <a:endParaRPr lang="en-US" dirty="0"/>
+          </a:p>
+        </p:txBody>
+      </p:sp>
+      <p:sp>
+        <p:nvSpPr>
+          <p:cNvPr id="3" name="Content Placeholder 2">
+            <a:extLst>
+              <a:ext uri="{FF2B5EF4-FFF2-40B4-BE49-F238E27FC236}">
+                <a16:creationId xmlns:a16="http://schemas.microsoft.com/office/drawing/2014/main" id="{7A5F4A2A-7FA4-4531-8187-E300E7337B3C}"/>
+              </a:ext>
+            </a:extLst>
+          </p:cNvPr>
+          <p:cNvSpPr>
+            <a:spLocks noGrp="1"/>
+          </p:cNvSpPr>
+          <p:nvPr>
+            <p:ph idx="1"/>
           </p:nvPr>
         </p:nvSpPr>
         <p:spPr/>
@@ -3385,7 +3382,7 @@
     </p:spTree>
     <p:extLst>
       <p:ext uri="{BB962C8B-B14F-4D97-AF65-F5344CB8AC3E}">
-        <p14:creationId xmlns:p14="http://schemas.microsoft.com/office/powerpoint/2010/main" val="712401421"/>
+        <p14:creationId xmlns:p14="http://schemas.microsoft.com/office/powerpoint/2010/main" val="4122137575"/>
       </p:ext>
     </p:extLst>
   </p:cSld>
@@ -3412,109 +3409,173 @@
           <a:chExt cx="0" cy="0"/>
         </a:xfrm>
       </p:grpSpPr>
-      <p:sp>
-        <p:nvSpPr>
-          <p:cNvPr id="2" name="Title 1">
-            <a:extLst>
-              <a:ext uri="{FF2B5EF4-FFF2-40B4-BE49-F238E27FC236}">
-                <a16:creationId xmlns:a16="http://schemas.microsoft.com/office/drawing/2014/main" id="{3075F0DB-F615-4CB5-B02A-A6056A35FBB3}"/>
-              </a:ext>
-            </a:extLst>
-          </p:cNvPr>
-          <p:cNvSpPr>
-            <a:spLocks noGrp="1"/>
-          </p:cNvSpPr>
-          <p:nvPr>
-            <p:ph type="title"/>
-          </p:nvPr>
-        </p:nvSpPr>
-        <p:spPr/>
-        <p:txBody>
-          <a:bodyPr/>
-          <a:lstStyle/>
-          <a:p>
-            <a:r>
-              <a:rPr lang="en-US" dirty="0"/>
-              <a:t>120 kHz </a:t>
-            </a:r>
-          </a:p>
-        </p:txBody>
-      </p:sp>
-      <p:pic>
-        <p:nvPicPr>
-          <p:cNvPr id="5" name="Content Placeholder 4">
-            <a:extLst>
-              <a:ext uri="{FF2B5EF4-FFF2-40B4-BE49-F238E27FC236}">
-                <a16:creationId xmlns:a16="http://schemas.microsoft.com/office/drawing/2014/main" id="{51958310-5625-4A4D-9CE2-8DC1FB4F612A}"/>
-              </a:ext>
-            </a:extLst>
-          </p:cNvPr>
-          <p:cNvPicPr>
-            <a:picLocks noGrp="1" noChangeAspect="1"/>
-          </p:cNvPicPr>
-          <p:nvPr>
-            <p:ph idx="1"/>
-          </p:nvPr>
-        </p:nvPicPr>
-        <p:blipFill>
-          <a:blip r:embed="rId2">
-            <a:extLst>
-              <a:ext uri="{28A0092B-C50C-407E-A947-70E740481C1C}">
-                <a14:useLocalDpi xmlns:a14="http://schemas.microsoft.com/office/drawing/2010/main" val="0"/>
-              </a:ext>
-            </a:extLst>
-          </a:blip>
-          <a:stretch>
-            <a:fillRect/>
-          </a:stretch>
-        </p:blipFill>
-        <p:spPr>
+      <p:grpSp>
+        <p:nvGrpSpPr>
+          <p:cNvPr id="2" name="Group 1">
+            <a:extLst>
+              <a:ext uri="{FF2B5EF4-FFF2-40B4-BE49-F238E27FC236}">
+                <a16:creationId xmlns:a16="http://schemas.microsoft.com/office/drawing/2014/main" id="{48AE5247-3161-47EF-A894-7EDB366AD0CE}"/>
+              </a:ext>
+            </a:extLst>
+          </p:cNvPr>
+          <p:cNvGrpSpPr/>
+          <p:nvPr/>
+        </p:nvGrpSpPr>
+        <p:grpSpPr>
           <a:xfrm>
-            <a:off x="762000" y="2001044"/>
-            <a:ext cx="5334000" cy="4000500"/>
+            <a:off x="612648" y="1342246"/>
+            <a:ext cx="10817352" cy="4087004"/>
+            <a:chOff x="612648" y="1342246"/>
+            <a:chExt cx="10817352" cy="4087004"/>
           </a:xfrm>
-        </p:spPr>
-      </p:pic>
-      <p:pic>
-        <p:nvPicPr>
-          <p:cNvPr id="7" name="Picture 6">
-            <a:extLst>
-              <a:ext uri="{FF2B5EF4-FFF2-40B4-BE49-F238E27FC236}">
-                <a16:creationId xmlns:a16="http://schemas.microsoft.com/office/drawing/2014/main" id="{6CE50CE4-D9B4-4903-907A-4970848365F6}"/>
-              </a:ext>
-            </a:extLst>
-          </p:cNvPr>
-          <p:cNvPicPr>
-            <a:picLocks noChangeAspect="1"/>
-          </p:cNvPicPr>
-          <p:nvPr/>
-        </p:nvPicPr>
-        <p:blipFill>
-          <a:blip r:embed="rId3">
-            <a:extLst>
-              <a:ext uri="{28A0092B-C50C-407E-A947-70E740481C1C}">
-                <a14:useLocalDpi xmlns:a14="http://schemas.microsoft.com/office/drawing/2010/main" val="0"/>
-              </a:ext>
-            </a:extLst>
-          </a:blip>
-          <a:stretch>
-            <a:fillRect/>
-          </a:stretch>
-        </p:blipFill>
-        <p:spPr>
-          <a:xfrm>
-            <a:off x="6672262" y="2001044"/>
-            <a:ext cx="5334000" cy="4000500"/>
-          </a:xfrm>
-          <a:prstGeom prst="rect">
-            <a:avLst/>
-          </a:prstGeom>
-        </p:spPr>
-      </p:pic>
+        </p:grpSpPr>
+        <p:pic>
+          <p:nvPicPr>
+            <p:cNvPr id="5" name="Picture 4">
+              <a:extLst>
+                <a:ext uri="{FF2B5EF4-FFF2-40B4-BE49-F238E27FC236}">
+                  <a16:creationId xmlns:a16="http://schemas.microsoft.com/office/drawing/2014/main" id="{BDBC2444-46D1-4C96-B71E-B1ADBF610EB3}"/>
+                </a:ext>
+              </a:extLst>
+            </p:cNvPr>
+            <p:cNvPicPr>
+              <a:picLocks noChangeAspect="1"/>
+            </p:cNvPicPr>
+            <p:nvPr/>
+          </p:nvPicPr>
+          <p:blipFill>
+            <a:blip r:embed="rId2">
+              <a:extLst>
+                <a:ext uri="{28A0092B-C50C-407E-A947-70E740481C1C}">
+                  <a14:useLocalDpi xmlns:a14="http://schemas.microsoft.com/office/drawing/2010/main" val="0"/>
+                </a:ext>
+              </a:extLst>
+            </a:blip>
+            <a:stretch>
+              <a:fillRect/>
+            </a:stretch>
+          </p:blipFill>
+          <p:spPr>
+            <a:xfrm>
+              <a:off x="612648" y="1428750"/>
+              <a:ext cx="5334000" cy="4000500"/>
+            </a:xfrm>
+            <a:prstGeom prst="rect">
+              <a:avLst/>
+            </a:prstGeom>
+          </p:spPr>
+        </p:pic>
+        <p:pic>
+          <p:nvPicPr>
+            <p:cNvPr id="7" name="Picture 6">
+              <a:extLst>
+                <a:ext uri="{FF2B5EF4-FFF2-40B4-BE49-F238E27FC236}">
+                  <a16:creationId xmlns:a16="http://schemas.microsoft.com/office/drawing/2014/main" id="{F7B315D4-8799-4933-B1C1-4CDBB377E784}"/>
+                </a:ext>
+              </a:extLst>
+            </p:cNvPr>
+            <p:cNvPicPr>
+              <a:picLocks noChangeAspect="1"/>
+            </p:cNvPicPr>
+            <p:nvPr/>
+          </p:nvPicPr>
+          <p:blipFill>
+            <a:blip r:embed="rId3">
+              <a:extLst>
+                <a:ext uri="{28A0092B-C50C-407E-A947-70E740481C1C}">
+                  <a14:useLocalDpi xmlns:a14="http://schemas.microsoft.com/office/drawing/2010/main" val="0"/>
+                </a:ext>
+              </a:extLst>
+            </a:blip>
+            <a:stretch>
+              <a:fillRect/>
+            </a:stretch>
+          </p:blipFill>
+          <p:spPr>
+            <a:xfrm>
+              <a:off x="6096000" y="1428750"/>
+              <a:ext cx="5334000" cy="4000500"/>
+            </a:xfrm>
+            <a:prstGeom prst="rect">
+              <a:avLst/>
+            </a:prstGeom>
+          </p:spPr>
+        </p:pic>
+        <p:sp>
+          <p:nvSpPr>
+            <p:cNvPr id="8" name="TextBox 7">
+              <a:extLst>
+                <a:ext uri="{FF2B5EF4-FFF2-40B4-BE49-F238E27FC236}">
+                  <a16:creationId xmlns:a16="http://schemas.microsoft.com/office/drawing/2014/main" id="{1C59CAA8-B4E7-4DB0-A2C8-E8FD4FF72992}"/>
+                </a:ext>
+              </a:extLst>
+            </p:cNvPr>
+            <p:cNvSpPr txBox="1"/>
+            <p:nvPr/>
+          </p:nvSpPr>
+          <p:spPr>
+            <a:xfrm>
+              <a:off x="682092" y="1342246"/>
+              <a:ext cx="365760" cy="369332"/>
+            </a:xfrm>
+            <a:prstGeom prst="rect">
+              <a:avLst/>
+            </a:prstGeom>
+            <a:noFill/>
+          </p:spPr>
+          <p:txBody>
+            <a:bodyPr wrap="square" rtlCol="0">
+              <a:spAutoFit/>
+            </a:bodyPr>
+            <a:lstStyle/>
+            <a:p>
+              <a:r>
+                <a:rPr lang="en-US" dirty="0"/>
+                <a:t>A</a:t>
+              </a:r>
+            </a:p>
+          </p:txBody>
+        </p:sp>
+        <p:sp>
+          <p:nvSpPr>
+            <p:cNvPr id="9" name="TextBox 8">
+              <a:extLst>
+                <a:ext uri="{FF2B5EF4-FFF2-40B4-BE49-F238E27FC236}">
+                  <a16:creationId xmlns:a16="http://schemas.microsoft.com/office/drawing/2014/main" id="{3C4F61DD-D723-4C0C-BD51-0E7B02040A3B}"/>
+                </a:ext>
+              </a:extLst>
+            </p:cNvPr>
+            <p:cNvSpPr txBox="1"/>
+            <p:nvPr/>
+          </p:nvSpPr>
+          <p:spPr>
+            <a:xfrm>
+              <a:off x="6048096" y="1342246"/>
+              <a:ext cx="365760" cy="369332"/>
+            </a:xfrm>
+            <a:prstGeom prst="rect">
+              <a:avLst/>
+            </a:prstGeom>
+            <a:noFill/>
+          </p:spPr>
+          <p:txBody>
+            <a:bodyPr wrap="square" rtlCol="0">
+              <a:spAutoFit/>
+            </a:bodyPr>
+            <a:lstStyle/>
+            <a:p>
+              <a:r>
+                <a:rPr lang="en-US" dirty="0"/>
+                <a:t>B</a:t>
+              </a:r>
+            </a:p>
+          </p:txBody>
+        </p:sp>
+      </p:grpSp>
     </p:spTree>
     <p:extLst>
       <p:ext uri="{BB962C8B-B14F-4D97-AF65-F5344CB8AC3E}">
-        <p14:creationId xmlns:p14="http://schemas.microsoft.com/office/powerpoint/2010/main" val="1578789917"/>
+        <p14:creationId xmlns:p14="http://schemas.microsoft.com/office/powerpoint/2010/main" val="3065632308"/>
       </p:ext>
     </p:extLst>
   </p:cSld>
@@ -3541,109 +3602,173 @@
           <a:chExt cx="0" cy="0"/>
         </a:xfrm>
       </p:grpSpPr>
-      <p:sp>
-        <p:nvSpPr>
-          <p:cNvPr id="2" name="Title 1">
-            <a:extLst>
-              <a:ext uri="{FF2B5EF4-FFF2-40B4-BE49-F238E27FC236}">
-                <a16:creationId xmlns:a16="http://schemas.microsoft.com/office/drawing/2014/main" id="{9AC13731-BBAC-4FDC-BB15-6C820F3231A4}"/>
-              </a:ext>
-            </a:extLst>
-          </p:cNvPr>
-          <p:cNvSpPr>
-            <a:spLocks noGrp="1"/>
-          </p:cNvSpPr>
-          <p:nvPr>
-            <p:ph type="title"/>
-          </p:nvPr>
-        </p:nvSpPr>
-        <p:spPr/>
-        <p:txBody>
-          <a:bodyPr/>
-          <a:lstStyle/>
-          <a:p>
-            <a:r>
-              <a:rPr lang="en-US" dirty="0"/>
-              <a:t>70 kHz</a:t>
-            </a:r>
-          </a:p>
-        </p:txBody>
-      </p:sp>
-      <p:pic>
-        <p:nvPicPr>
-          <p:cNvPr id="5" name="Content Placeholder 4">
-            <a:extLst>
-              <a:ext uri="{FF2B5EF4-FFF2-40B4-BE49-F238E27FC236}">
-                <a16:creationId xmlns:a16="http://schemas.microsoft.com/office/drawing/2014/main" id="{3B07F53E-6C49-430B-824D-38758230DCA5}"/>
-              </a:ext>
-            </a:extLst>
-          </p:cNvPr>
-          <p:cNvPicPr>
-            <a:picLocks noGrp="1" noChangeAspect="1"/>
-          </p:cNvPicPr>
-          <p:nvPr>
-            <p:ph idx="1"/>
-          </p:nvPr>
-        </p:nvPicPr>
-        <p:blipFill>
-          <a:blip r:embed="rId2">
-            <a:extLst>
-              <a:ext uri="{28A0092B-C50C-407E-A947-70E740481C1C}">
-                <a14:useLocalDpi xmlns:a14="http://schemas.microsoft.com/office/drawing/2010/main" val="0"/>
-              </a:ext>
-            </a:extLst>
-          </a:blip>
-          <a:stretch>
-            <a:fillRect/>
-          </a:stretch>
-        </p:blipFill>
-        <p:spPr>
+      <p:grpSp>
+        <p:nvGrpSpPr>
+          <p:cNvPr id="2" name="Group 1">
+            <a:extLst>
+              <a:ext uri="{FF2B5EF4-FFF2-40B4-BE49-F238E27FC236}">
+                <a16:creationId xmlns:a16="http://schemas.microsoft.com/office/drawing/2014/main" id="{78CE1D77-A15F-4715-9AA1-5BEF9B4EC88F}"/>
+              </a:ext>
+            </a:extLst>
+          </p:cNvPr>
+          <p:cNvGrpSpPr/>
+          <p:nvPr/>
+        </p:nvGrpSpPr>
+        <p:grpSpPr>
           <a:xfrm>
-            <a:off x="542925" y="2001044"/>
-            <a:ext cx="5334000" cy="4000500"/>
+            <a:off x="762000" y="1428750"/>
+            <a:ext cx="10668000" cy="4000500"/>
+            <a:chOff x="762000" y="1428750"/>
+            <a:chExt cx="10668000" cy="4000500"/>
           </a:xfrm>
-        </p:spPr>
-      </p:pic>
-      <p:pic>
-        <p:nvPicPr>
-          <p:cNvPr id="7" name="Picture 6">
-            <a:extLst>
-              <a:ext uri="{FF2B5EF4-FFF2-40B4-BE49-F238E27FC236}">
-                <a16:creationId xmlns:a16="http://schemas.microsoft.com/office/drawing/2014/main" id="{2BD7FFAE-2951-4970-9C7C-98F0C7388466}"/>
-              </a:ext>
-            </a:extLst>
-          </p:cNvPr>
-          <p:cNvPicPr>
-            <a:picLocks noChangeAspect="1"/>
-          </p:cNvPicPr>
-          <p:nvPr/>
-        </p:nvPicPr>
-        <p:blipFill>
-          <a:blip r:embed="rId3">
-            <a:extLst>
-              <a:ext uri="{28A0092B-C50C-407E-A947-70E740481C1C}">
-                <a14:useLocalDpi xmlns:a14="http://schemas.microsoft.com/office/drawing/2010/main" val="0"/>
-              </a:ext>
-            </a:extLst>
-          </a:blip>
-          <a:stretch>
-            <a:fillRect/>
-          </a:stretch>
-        </p:blipFill>
-        <p:spPr>
-          <a:xfrm>
-            <a:off x="6586537" y="2001044"/>
-            <a:ext cx="5334000" cy="4000500"/>
-          </a:xfrm>
-          <a:prstGeom prst="rect">
-            <a:avLst/>
-          </a:prstGeom>
-        </p:spPr>
-      </p:pic>
+        </p:grpSpPr>
+        <p:pic>
+          <p:nvPicPr>
+            <p:cNvPr id="5" name="Picture 4">
+              <a:extLst>
+                <a:ext uri="{FF2B5EF4-FFF2-40B4-BE49-F238E27FC236}">
+                  <a16:creationId xmlns:a16="http://schemas.microsoft.com/office/drawing/2014/main" id="{0DE979EF-BECE-4000-A92E-AB42CB3AB044}"/>
+                </a:ext>
+              </a:extLst>
+            </p:cNvPr>
+            <p:cNvPicPr>
+              <a:picLocks noChangeAspect="1"/>
+            </p:cNvPicPr>
+            <p:nvPr/>
+          </p:nvPicPr>
+          <p:blipFill>
+            <a:blip r:embed="rId2">
+              <a:extLst>
+                <a:ext uri="{28A0092B-C50C-407E-A947-70E740481C1C}">
+                  <a14:useLocalDpi xmlns:a14="http://schemas.microsoft.com/office/drawing/2010/main" val="0"/>
+                </a:ext>
+              </a:extLst>
+            </a:blip>
+            <a:stretch>
+              <a:fillRect/>
+            </a:stretch>
+          </p:blipFill>
+          <p:spPr>
+            <a:xfrm>
+              <a:off x="762000" y="1428750"/>
+              <a:ext cx="5334000" cy="4000500"/>
+            </a:xfrm>
+            <a:prstGeom prst="rect">
+              <a:avLst/>
+            </a:prstGeom>
+          </p:spPr>
+        </p:pic>
+        <p:pic>
+          <p:nvPicPr>
+            <p:cNvPr id="7" name="Picture 6">
+              <a:extLst>
+                <a:ext uri="{FF2B5EF4-FFF2-40B4-BE49-F238E27FC236}">
+                  <a16:creationId xmlns:a16="http://schemas.microsoft.com/office/drawing/2014/main" id="{6CB46E64-F83A-455A-BD9C-B2A832991C54}"/>
+                </a:ext>
+              </a:extLst>
+            </p:cNvPr>
+            <p:cNvPicPr>
+              <a:picLocks noChangeAspect="1"/>
+            </p:cNvPicPr>
+            <p:nvPr/>
+          </p:nvPicPr>
+          <p:blipFill>
+            <a:blip r:embed="rId3">
+              <a:extLst>
+                <a:ext uri="{28A0092B-C50C-407E-A947-70E740481C1C}">
+                  <a14:useLocalDpi xmlns:a14="http://schemas.microsoft.com/office/drawing/2010/main" val="0"/>
+                </a:ext>
+              </a:extLst>
+            </a:blip>
+            <a:stretch>
+              <a:fillRect/>
+            </a:stretch>
+          </p:blipFill>
+          <p:spPr>
+            <a:xfrm>
+              <a:off x="6096000" y="1428750"/>
+              <a:ext cx="5334000" cy="4000500"/>
+            </a:xfrm>
+            <a:prstGeom prst="rect">
+              <a:avLst/>
+            </a:prstGeom>
+          </p:spPr>
+        </p:pic>
+        <p:sp>
+          <p:nvSpPr>
+            <p:cNvPr id="8" name="TextBox 7">
+              <a:extLst>
+                <a:ext uri="{FF2B5EF4-FFF2-40B4-BE49-F238E27FC236}">
+                  <a16:creationId xmlns:a16="http://schemas.microsoft.com/office/drawing/2014/main" id="{2746649F-EE26-4F2A-9B4B-78E163B2018B}"/>
+                </a:ext>
+              </a:extLst>
+            </p:cNvPr>
+            <p:cNvSpPr txBox="1"/>
+            <p:nvPr/>
+          </p:nvSpPr>
+          <p:spPr>
+            <a:xfrm>
+              <a:off x="969264" y="1428750"/>
+              <a:ext cx="365760" cy="369332"/>
+            </a:xfrm>
+            <a:prstGeom prst="rect">
+              <a:avLst/>
+            </a:prstGeom>
+            <a:noFill/>
+          </p:spPr>
+          <p:txBody>
+            <a:bodyPr wrap="square" rtlCol="0">
+              <a:spAutoFit/>
+            </a:bodyPr>
+            <a:lstStyle/>
+            <a:p>
+              <a:r>
+                <a:rPr lang="en-US" dirty="0"/>
+                <a:t>A</a:t>
+              </a:r>
+            </a:p>
+          </p:txBody>
+        </p:sp>
+        <p:sp>
+          <p:nvSpPr>
+            <p:cNvPr id="9" name="TextBox 8">
+              <a:extLst>
+                <a:ext uri="{FF2B5EF4-FFF2-40B4-BE49-F238E27FC236}">
+                  <a16:creationId xmlns:a16="http://schemas.microsoft.com/office/drawing/2014/main" id="{5127BBEC-F36E-4224-B8F4-027D46D65726}"/>
+                </a:ext>
+              </a:extLst>
+            </p:cNvPr>
+            <p:cNvSpPr txBox="1"/>
+            <p:nvPr/>
+          </p:nvSpPr>
+          <p:spPr>
+            <a:xfrm>
+              <a:off x="6486144" y="1428750"/>
+              <a:ext cx="365760" cy="369332"/>
+            </a:xfrm>
+            <a:prstGeom prst="rect">
+              <a:avLst/>
+            </a:prstGeom>
+            <a:noFill/>
+          </p:spPr>
+          <p:txBody>
+            <a:bodyPr wrap="square" rtlCol="0">
+              <a:spAutoFit/>
+            </a:bodyPr>
+            <a:lstStyle/>
+            <a:p>
+              <a:r>
+                <a:rPr lang="en-US" dirty="0"/>
+                <a:t>B</a:t>
+              </a:r>
+            </a:p>
+          </p:txBody>
+        </p:sp>
+      </p:grpSp>
     </p:spTree>
     <p:extLst>
       <p:ext uri="{BB962C8B-B14F-4D97-AF65-F5344CB8AC3E}">
-        <p14:creationId xmlns:p14="http://schemas.microsoft.com/office/powerpoint/2010/main" val="2779782858"/>
+        <p14:creationId xmlns:p14="http://schemas.microsoft.com/office/powerpoint/2010/main" val="2498177955"/>
       </p:ext>
     </p:extLst>
   </p:cSld>
@@ -3670,63 +3795,103 @@
           <a:chExt cx="0" cy="0"/>
         </a:xfrm>
       </p:grpSpPr>
-      <p:sp>
-        <p:nvSpPr>
-          <p:cNvPr id="2" name="Title 1">
-            <a:extLst>
-              <a:ext uri="{FF2B5EF4-FFF2-40B4-BE49-F238E27FC236}">
-                <a16:creationId xmlns:a16="http://schemas.microsoft.com/office/drawing/2014/main" id="{8A1822CF-D0FA-43E7-BD6D-95C762EEF6A1}"/>
-              </a:ext>
-            </a:extLst>
-          </p:cNvPr>
-          <p:cNvSpPr>
-            <a:spLocks noGrp="1"/>
-          </p:cNvSpPr>
-          <p:nvPr>
-            <p:ph type="title"/>
-          </p:nvPr>
-        </p:nvSpPr>
-        <p:spPr/>
-        <p:txBody>
-          <a:bodyPr/>
-          <a:lstStyle/>
-          <a:p>
-            <a:r>
-              <a:rPr lang="en-US" dirty="0"/>
-              <a:t>grid_ll.2_lt_.1</a:t>
-            </a:r>
-          </a:p>
-        </p:txBody>
-      </p:sp>
-      <p:sp>
-        <p:nvSpPr>
-          <p:cNvPr id="3" name="Content Placeholder 2">
-            <a:extLst>
-              <a:ext uri="{FF2B5EF4-FFF2-40B4-BE49-F238E27FC236}">
-                <a16:creationId xmlns:a16="http://schemas.microsoft.com/office/drawing/2014/main" id="{7A5F4A2A-7FA4-4531-8187-E300E7337B3C}"/>
-              </a:ext>
-            </a:extLst>
-          </p:cNvPr>
-          <p:cNvSpPr>
-            <a:spLocks noGrp="1"/>
-          </p:cNvSpPr>
-          <p:nvPr>
-            <p:ph idx="1"/>
-          </p:nvPr>
-        </p:nvSpPr>
-        <p:spPr/>
-        <p:txBody>
-          <a:bodyPr/>
-          <a:lstStyle/>
-          <a:p>
-            <a:endParaRPr lang="en-US"/>
-          </a:p>
-        </p:txBody>
-      </p:sp>
+      <p:grpSp>
+        <p:nvGrpSpPr>
+          <p:cNvPr id="6" name="Group 5">
+            <a:extLst>
+              <a:ext uri="{FF2B5EF4-FFF2-40B4-BE49-F238E27FC236}">
+                <a16:creationId xmlns:a16="http://schemas.microsoft.com/office/drawing/2014/main" id="{50078D6D-F1FC-43A3-9692-C988B605B0F6}"/>
+              </a:ext>
+            </a:extLst>
+          </p:cNvPr>
+          <p:cNvGrpSpPr/>
+          <p:nvPr/>
+        </p:nvGrpSpPr>
+        <p:grpSpPr>
+          <a:xfrm>
+            <a:off x="1307756" y="1373144"/>
+            <a:ext cx="10668000" cy="4006678"/>
+            <a:chOff x="1307756" y="1373144"/>
+            <a:chExt cx="10668000" cy="4006678"/>
+          </a:xfrm>
+        </p:grpSpPr>
+        <p:pic>
+          <p:nvPicPr>
+            <p:cNvPr id="3" name="Picture 2">
+              <a:extLst>
+                <a:ext uri="{FF2B5EF4-FFF2-40B4-BE49-F238E27FC236}">
+                  <a16:creationId xmlns:a16="http://schemas.microsoft.com/office/drawing/2014/main" id="{8F05835E-E60D-433C-AC98-56472900ED36}"/>
+                </a:ext>
+              </a:extLst>
+            </p:cNvPr>
+            <p:cNvPicPr>
+              <a:picLocks noChangeAspect="1"/>
+            </p:cNvPicPr>
+            <p:nvPr/>
+          </p:nvPicPr>
+          <p:blipFill>
+            <a:blip r:embed="rId2">
+              <a:extLst>
+                <a:ext uri="{28A0092B-C50C-407E-A947-70E740481C1C}">
+                  <a14:useLocalDpi xmlns:a14="http://schemas.microsoft.com/office/drawing/2010/main" val="0"/>
+                </a:ext>
+              </a:extLst>
+            </a:blip>
+            <a:stretch>
+              <a:fillRect/>
+            </a:stretch>
+          </p:blipFill>
+          <p:spPr>
+            <a:xfrm>
+              <a:off x="6641756" y="1379322"/>
+              <a:ext cx="5334000" cy="4000500"/>
+            </a:xfrm>
+            <a:prstGeom prst="rect">
+              <a:avLst/>
+            </a:prstGeom>
+          </p:spPr>
+        </p:pic>
+        <p:pic>
+          <p:nvPicPr>
+            <p:cNvPr id="5" name="Picture 4">
+              <a:extLst>
+                <a:ext uri="{FF2B5EF4-FFF2-40B4-BE49-F238E27FC236}">
+                  <a16:creationId xmlns:a16="http://schemas.microsoft.com/office/drawing/2014/main" id="{EC82BF63-250A-4D06-A775-2E8170CEAC69}"/>
+                </a:ext>
+              </a:extLst>
+            </p:cNvPr>
+            <p:cNvPicPr>
+              <a:picLocks noChangeAspect="1"/>
+            </p:cNvPicPr>
+            <p:nvPr/>
+          </p:nvPicPr>
+          <p:blipFill>
+            <a:blip r:embed="rId3">
+              <a:extLst>
+                <a:ext uri="{28A0092B-C50C-407E-A947-70E740481C1C}">
+                  <a14:useLocalDpi xmlns:a14="http://schemas.microsoft.com/office/drawing/2010/main" val="0"/>
+                </a:ext>
+              </a:extLst>
+            </a:blip>
+            <a:stretch>
+              <a:fillRect/>
+            </a:stretch>
+          </p:blipFill>
+          <p:spPr>
+            <a:xfrm>
+              <a:off x="1307756" y="1373144"/>
+              <a:ext cx="5334000" cy="4000500"/>
+            </a:xfrm>
+            <a:prstGeom prst="rect">
+              <a:avLst/>
+            </a:prstGeom>
+          </p:spPr>
+        </p:pic>
+      </p:grpSp>
     </p:spTree>
     <p:extLst>
       <p:ext uri="{BB962C8B-B14F-4D97-AF65-F5344CB8AC3E}">
-        <p14:creationId xmlns:p14="http://schemas.microsoft.com/office/powerpoint/2010/main" val="4122137575"/>
+        <p14:creationId xmlns:p14="http://schemas.microsoft.com/office/powerpoint/2010/main" val="2903045349"/>
       </p:ext>
     </p:extLst>
   </p:cSld>
